--- a/docs/presentation_final.pptx
+++ b/docs/presentation_final.pptx
@@ -2647,7 +2647,7 @@
           <a:lstStyle/>
           <a:p>
             <a:r>
-              <a:t>이제 앞의 회귀 결과로 정부 재정 부담과 물가 영향을 계산하고, 다음 결정인 11차 최고가격을 권고하겠습니다. 결론은 휘발유 30원, 경유 90원, 등유 120원 인상입니다.</a:t>
+              <a:t>정부는 4주마다 휘발유·경유·등유 최고가격을 정합니다. 올리면 정부 지원금은 줄지만 물가가 오릅니다. 저희는 이 둘을 숫자로 따져, 다음 결정인 11차에 유종별로 몇 원을 조정할지 미리 권고하는 프로그램을 만들었습니다. 결론은 휘발유 30원, 경유 90원, 등유 120원 인상입니다.</a:t>
             </a:r>
           </a:p>
         </p:txBody>
@@ -2717,7 +2717,7 @@
           <a:lstStyle/>
           <a:p>
             <a:r>
-              <a:t>반영률, 물가 한도, 유가를 뽑는 기간을 바꿔 다시 계산해도, 휘발유를 가장 적게 올린다는 결론은 8가지 경우 모두 같았습니다.</a:t>
+              <a:t>반영률, 물가 한도, 유가 흐름을 바꿔 다시 계산해도, 휘발유를 가장 적게 올린다는 결론은 8가지 모두 같았습니다.</a:t>
             </a:r>
           </a:p>
         </p:txBody>
@@ -2787,7 +2787,7 @@
           <a:lstStyle/>
           <a:p>
             <a:r>
-              <a:t>같은 규칙을 2차부터 10차까지의 과거 결정에 적용하면, 정부보다 상한을 더 올렸을 것입니다. 정부는 지원금이 커도 동결했고, 지원금이 가장 작던 7차에는 내렸습니다. 정부가 재정보다 물가를 더 중시해 왔다는 뜻입니다. 저희 권고는 '재정까지 함께 고려하면 이만큼 올릴 여지가 있다'는 기준을 제시합니다.</a:t>
+              <a:t>같은 규칙을 과거 결정에 적용하면 정부보다 상한을 더 올렸을 것입니다. 정부가 재정보다 물가를 더 중시해 왔다는 뜻이고, 저희 권고는 재정까지 함께 고려한 비교 기준입니다.</a:t>
             </a:r>
           </a:p>
         </p:txBody>
@@ -2857,7 +2857,7 @@
           <a:lstStyle/>
           <a:p>
             <a:r>
-              <a:t>이상으로 발표를 마치겠습니다. 감사합니다. (예상 질문) 물가 한도 0.104%p의 근거: 상한제가 낮춰 둔 물가 0.623%p를 6차수에 나눠 되돌리는 속도. 재정 부담이 업계 추산(4~5조 원)보다 큰 이유: 기준 가격이 국제가·환율에 최근 52주 국내 가격 수준 보정까지 반영해, 정부의 '원가 + 적정 마진' 기준보다 높게 잡힘.</a:t>
+              <a:t>정리하면, 유종마다 다르게 조정하면 같은 물가 부담으로 지원금을 더 많이 줄일 수 있습니다. 이 프로그램은 4주마다 최신 자료로 다시 돌려 다음 결정의 근거로 쓸 수 있습니다. 감사합니다.</a:t>
             </a:r>
           </a:p>
         </p:txBody>
@@ -2927,7 +2927,7 @@
           <a:lstStyle/>
           <a:p>
             <a:r>
-              <a:t>계산은 네 단계입니다. 회귀로 구한 '상한제가 없었다면 가격'에서 최고가격을 빼면 리터당 정부 지원금액이 나옵니다. 여기에 판매량을 곱해 재정 부담을 구하고, 상한을 올리면 물가가 얼마나 오르는지 계산한 뒤, 둘을 함께 따져 11차 조정 폭을 고릅니다.</a:t>
+              <a:t>지금까지 정부는 세 유종을 늘 같은 폭으로 조정했습니다. 저희 프로그램은 팀원이 만든 회귀 결과를 받아, 재정 부담, 물가 영향, 최적 조정 폭을 유종별로 차례로 계산합니다.</a:t>
             </a:r>
           </a:p>
         </p:txBody>
@@ -2997,7 +2997,7 @@
           <a:lstStyle/>
           <a:p>
             <a:r>
-              <a:t>그래프는 정부가 매주 정유사에 리터당 지원한 금액입니다. 3~4월에는 경유가 1,000원을 넘었고, 6월 말에는 0 근처까지 내려왔다가, 9월 말 다시 휘발유 335원, 경유 511원으로 커졌습니다. 판매량을 곱해 모두 더하면 3월 13일부터 9월 26일까지 6.35조 원이고, 그중 71%가 경유입니다.</a:t>
+              <a:t>그래프는 정부가 매주 정유사에 리터당 지원한 금액입니다. 3~4월 경유는 1,000원을 넘었고, 6월 말 0 근처까지 내려왔다가 9월 말 다시 커졌습니다. 판매량을 곱해 더하면 9월 26일까지 6.35조 원이고, 71%가 경유입니다.</a:t>
             </a:r>
           </a:p>
         </p:txBody>
@@ -3067,7 +3067,7 @@
           <a:lstStyle/>
           <a:p>
             <a:r>
-              <a:t>상한을 올린다고 주유소 가격이 그만큼 바로 오르지는 않습니다. 실제 2차와 7차 조정을 보면, 4주 뒤 휘발유와 경유는 약 90%, 등유는 39%만 따라 움직였습니다. 이 반영률과 물가 가중치로 계산하면 상한제가 3~8월 물가를 0.58%p 낮췄는데, 정부 발표 0.6%p와 거의 같습니다.</a:t>
+              <a:t>상한을 올려도 주유소 가격이 다 따라 오르지는 않습니다. 실제 두 번의 조정에서 4주 뒤 휘발유·경유는 약 90%, 등유는 39%만 올랐습니다. 이 방법으로 계산하면 상한제가 3~8월 물가를 0.58%p 낮췄는데, 정부 발표 0.6%p와 거의 같습니다. 기준 판매가는 오피넷 API로 오늘 값을 받아 씁니다.</a:t>
             </a:r>
           </a:p>
         </p:txBody>
@@ -3137,7 +3137,7 @@
           <a:lstStyle/>
           <a:p>
             <a:r>
-              <a:t>그래서 같은 100원을 올려도 물가 영향은 휘발유 0.103%p, 등유 0.005%p로 약 21배 차이가 납니다. 휘발유는 적게, 경유와 등유는 많이 올리는 것이 물가 부담이 적습니다.</a:t>
+              <a:t>그래서 같은 100원을 올려도 물가 영향은 휘발유가 등유의 약 21배입니다. 휘발유는 적게, 경유와 등유는 많이 올리는 것이 유리합니다.</a:t>
             </a:r>
           </a:p>
         </p:txBody>
@@ -3207,7 +3207,7 @@
           <a:lstStyle/>
           <a:p>
             <a:r>
-              <a:t>앞으로의 유가는 알 수 없기 때문에, 과거 유가와 환율의 움직임을 4주씩 뽑아 이어 붙여 24주짜리 유가 흐름 500가지를 만들었습니다. 유종마다 6단계, 모두 216가지 조정안을 500가지 흐름에 적용해 정부 지원금을 계산하고, 물가 한도 안에서 평균 지원금이 가장 적은 안을 골랐습니다.</a:t>
+              <a:t>미래 유가는 알 수 없어서 몬테카를로 시뮬레이션을 썼습니다. 과거 유가와 환율의 움직임으로 24주 유가 흐름 500가지를 만들고, 216가지 조정안을 모두 적용해 10만 8천 번 계산합니다. 사람이 손으로 할 수 없는 계산이라 프로그램이 필요합니다.</a:t>
             </a:r>
           </a:p>
         </p:txBody>
@@ -3277,7 +3277,7 @@
           <a:lstStyle/>
           <a:p>
             <a:r>
-              <a:t>물가 한도는 한 달 0.104%p입니다. 상한제가 지금 낮춰 두고 있는 물가 0.623%p를 남은 여섯 번의 결정에 나눠 되돌리는 속도입니다. 정부가 실제로 한 2차 인상(0.375%p)의 3분의 1이 안 되는 크기입니다.</a:t>
+              <a:t>고르는 기준은 한 달 물가 상승 0.104%p 이내에서 정부 지원금이 가장 적은 안입니다. 상한제가 낮춰 둔 물가를 여섯 번에 나눠 되돌리는 속도입니다.</a:t>
             </a:r>
           </a:p>
         </p:txBody>
@@ -3347,7 +3347,7 @@
           <a:lstStyle/>
           <a:p>
             <a:r>
-              <a:t>결과입니다. 휘발유 30원, 경유 90원, 등유 120원 인상을 권고합니다. 이번 달 물가는 0.1%p 오르고, 정부 지원금은 4주 동안 약 1,900억 원 줄어듭니다.</a:t>
+              <a:t>직접 실행해 보겠습니다. (터미널에서 python policy/optimize.py 실행) 오피넷에서 오늘 판매가를 받고, 몇 초 안에 권고가 나옵니다. 휘발유 30원, 경유 90원, 등유 120원 인상입니다. 이번 달 물가는 0.1%p 오르고, 지원금은 4주에 약 1,900억 원 줄어듭니다.</a:t>
             </a:r>
           </a:p>
         </p:txBody>
@@ -3417,7 +3417,7 @@
           <a:lstStyle/>
           <a:p>
             <a:r>
-              <a:t>그대로 동결하면 앞으로 24주 동안 정부 지원금은 5.72조 원입니다. 권고대로 하면 4.86조 원으로, 약 8,600억 원을 줄일 수 있습니다.</a:t>
+              <a:t>동결하면 앞으로 24주 지원금은 5.72조 원, 권고대로 하면 4.86조 원으로 약 8,600억 원 줄어듭니다.</a:t>
             </a:r>
           </a:p>
         </p:txBody>
